--- a/class/cloud_infra_mgmt/06주차_Kubernetes핵심2/01_강의자료/3차시_MySQL데이터영속성검증.pptx
+++ b/class/cloud_infra_mgmt/06주차_Kubernetes핵심2/01_강의자료/3차시_MySQL데이터영속성검증.pptx
@@ -5249,7 +5249,7 @@
           <a:p>
             <a:pPr>
               <a:lnSpc>
-                <a:spcPct val="115000"/>
+                <a:spcPct val="149500"/>
               </a:lnSpc>
             </a:pPr>
             <a:r>
@@ -5274,7 +5274,7 @@
           <a:p>
             <a:pPr>
               <a:lnSpc>
-                <a:spcPct val="115000"/>
+                <a:spcPct val="149500"/>
               </a:lnSpc>
             </a:pPr>
             <a:r>
@@ -5299,7 +5299,7 @@
           <a:p>
             <a:pPr>
               <a:lnSpc>
-                <a:spcPct val="115000"/>
+                <a:spcPct val="149500"/>
               </a:lnSpc>
             </a:pPr>
             <a:r>
@@ -6807,16 +6807,104 @@
       </p:sp>
       <p:sp>
         <p:nvSpPr>
-          <p:cNvPr id="7" name="Isosceles Triangle 6"/>
+          <p:cNvPr id="7" name="Rectangle 6"/>
           <p:cNvSpPr/>
           <p:nvPr/>
         </p:nvSpPr>
         <p:spPr>
-          <a:xfrm rot="5400000">
-            <a:off x="3495751" y="1673352"/>
-            <a:ext cx="146304" cy="146304"/>
-          </a:xfrm>
-          <a:prstGeom prst="triangle">
+          <a:xfrm>
+            <a:off x="5096865" y="1730959"/>
+            <a:ext cx="1995220" cy="31089"/>
+          </a:xfrm>
+          <a:prstGeom prst="rect">
+            <a:avLst/>
+          </a:prstGeom>
+          <a:solidFill>
+            <a:srgbClr val="14B8A6"/>
+          </a:solidFill>
+          <a:ln>
+            <a:noFill/>
+          </a:ln>
+          <a:effectLst/>
+        </p:spPr>
+        <p:style>
+          <a:lnRef idx="1">
+            <a:schemeClr val="accent1"/>
+          </a:lnRef>
+          <a:fillRef idx="3">
+            <a:schemeClr val="accent1"/>
+          </a:fillRef>
+          <a:effectRef idx="2">
+            <a:schemeClr val="accent1"/>
+          </a:effectRef>
+          <a:fontRef idx="minor">
+            <a:schemeClr val="lt1"/>
+          </a:fontRef>
+        </p:style>
+        <p:txBody>
+          <a:bodyPr rtlCol="0" anchor="ctr"/>
+          <a:lstStyle/>
+          <a:p>
+            <a:pPr algn="ctr"/>
+          </a:p>
+        </p:txBody>
+      </p:sp>
+      <p:sp>
+        <p:nvSpPr>
+          <p:cNvPr id="8" name="Rectangle 7"/>
+          <p:cNvSpPr/>
+          <p:nvPr/>
+        </p:nvSpPr>
+        <p:spPr>
+          <a:xfrm>
+            <a:off x="7622438" y="1730959"/>
+            <a:ext cx="1995220" cy="31089"/>
+          </a:xfrm>
+          <a:prstGeom prst="rect">
+            <a:avLst/>
+          </a:prstGeom>
+          <a:solidFill>
+            <a:srgbClr val="14B8A6"/>
+          </a:solidFill>
+          <a:ln>
+            <a:noFill/>
+          </a:ln>
+          <a:effectLst/>
+        </p:spPr>
+        <p:style>
+          <a:lnRef idx="1">
+            <a:schemeClr val="accent1"/>
+          </a:lnRef>
+          <a:fillRef idx="3">
+            <a:schemeClr val="accent1"/>
+          </a:fillRef>
+          <a:effectRef idx="2">
+            <a:schemeClr val="accent1"/>
+          </a:effectRef>
+          <a:fontRef idx="minor">
+            <a:schemeClr val="lt1"/>
+          </a:fontRef>
+        </p:style>
+        <p:txBody>
+          <a:bodyPr rtlCol="0" anchor="ctr"/>
+          <a:lstStyle/>
+          <a:p>
+            <a:pPr algn="ctr"/>
+          </a:p>
+        </p:txBody>
+      </p:sp>
+      <p:sp>
+        <p:nvSpPr>
+          <p:cNvPr id="9" name="Oval 8"/>
+          <p:cNvSpPr/>
+          <p:nvPr/>
+        </p:nvSpPr>
+        <p:spPr>
+          <a:xfrm>
+            <a:off x="2040940" y="1481328"/>
+            <a:ext cx="530352" cy="530352"/>
+          </a:xfrm>
+          <a:prstGeom prst="ellipse">
             <a:avLst/>
           </a:prstGeom>
           <a:solidFill>
@@ -6851,227 +6939,7 @@
       </p:sp>
       <p:sp>
         <p:nvSpPr>
-          <p:cNvPr id="8" name="Rectangle 7"/>
-          <p:cNvSpPr/>
-          <p:nvPr/>
-        </p:nvSpPr>
-        <p:spPr>
-          <a:xfrm>
-            <a:off x="5096865" y="1730959"/>
-            <a:ext cx="1995220" cy="31089"/>
-          </a:xfrm>
-          <a:prstGeom prst="rect">
-            <a:avLst/>
-          </a:prstGeom>
-          <a:solidFill>
-            <a:srgbClr val="14B8A6"/>
-          </a:solidFill>
-          <a:ln>
-            <a:noFill/>
-          </a:ln>
-          <a:effectLst/>
-        </p:spPr>
-        <p:style>
-          <a:lnRef idx="1">
-            <a:schemeClr val="accent1"/>
-          </a:lnRef>
-          <a:fillRef idx="3">
-            <a:schemeClr val="accent1"/>
-          </a:fillRef>
-          <a:effectRef idx="2">
-            <a:schemeClr val="accent1"/>
-          </a:effectRef>
-          <a:fontRef idx="minor">
-            <a:schemeClr val="lt1"/>
-          </a:fontRef>
-        </p:style>
-        <p:txBody>
-          <a:bodyPr rtlCol="0" anchor="ctr"/>
-          <a:lstStyle/>
-          <a:p>
-            <a:pPr algn="ctr"/>
-          </a:p>
-        </p:txBody>
-      </p:sp>
-      <p:sp>
-        <p:nvSpPr>
-          <p:cNvPr id="9" name="Isosceles Triangle 8"/>
-          <p:cNvSpPr/>
-          <p:nvPr/>
-        </p:nvSpPr>
-        <p:spPr>
-          <a:xfrm rot="5400000">
-            <a:off x="6021324" y="1673352"/>
-            <a:ext cx="146304" cy="146304"/>
-          </a:xfrm>
-          <a:prstGeom prst="triangle">
-            <a:avLst/>
-          </a:prstGeom>
-          <a:solidFill>
-            <a:srgbClr val="0D9488"/>
-          </a:solidFill>
-          <a:ln>
-            <a:noFill/>
-          </a:ln>
-          <a:effectLst/>
-        </p:spPr>
-        <p:style>
-          <a:lnRef idx="1">
-            <a:schemeClr val="accent1"/>
-          </a:lnRef>
-          <a:fillRef idx="3">
-            <a:schemeClr val="accent1"/>
-          </a:fillRef>
-          <a:effectRef idx="2">
-            <a:schemeClr val="accent1"/>
-          </a:effectRef>
-          <a:fontRef idx="minor">
-            <a:schemeClr val="lt1"/>
-          </a:fontRef>
-        </p:style>
-        <p:txBody>
-          <a:bodyPr rtlCol="0" anchor="ctr"/>
-          <a:lstStyle/>
-          <a:p>
-            <a:pPr algn="ctr"/>
-          </a:p>
-        </p:txBody>
-      </p:sp>
-      <p:sp>
-        <p:nvSpPr>
-          <p:cNvPr id="10" name="Rectangle 9"/>
-          <p:cNvSpPr/>
-          <p:nvPr/>
-        </p:nvSpPr>
-        <p:spPr>
-          <a:xfrm>
-            <a:off x="7622438" y="1730959"/>
-            <a:ext cx="1995220" cy="31089"/>
-          </a:xfrm>
-          <a:prstGeom prst="rect">
-            <a:avLst/>
-          </a:prstGeom>
-          <a:solidFill>
-            <a:srgbClr val="14B8A6"/>
-          </a:solidFill>
-          <a:ln>
-            <a:noFill/>
-          </a:ln>
-          <a:effectLst/>
-        </p:spPr>
-        <p:style>
-          <a:lnRef idx="1">
-            <a:schemeClr val="accent1"/>
-          </a:lnRef>
-          <a:fillRef idx="3">
-            <a:schemeClr val="accent1"/>
-          </a:fillRef>
-          <a:effectRef idx="2">
-            <a:schemeClr val="accent1"/>
-          </a:effectRef>
-          <a:fontRef idx="minor">
-            <a:schemeClr val="lt1"/>
-          </a:fontRef>
-        </p:style>
-        <p:txBody>
-          <a:bodyPr rtlCol="0" anchor="ctr"/>
-          <a:lstStyle/>
-          <a:p>
-            <a:pPr algn="ctr"/>
-          </a:p>
-        </p:txBody>
-      </p:sp>
-      <p:sp>
-        <p:nvSpPr>
-          <p:cNvPr id="11" name="Isosceles Triangle 10"/>
-          <p:cNvSpPr/>
-          <p:nvPr/>
-        </p:nvSpPr>
-        <p:spPr>
-          <a:xfrm rot="5400000">
-            <a:off x="8546896" y="1673352"/>
-            <a:ext cx="146304" cy="146304"/>
-          </a:xfrm>
-          <a:prstGeom prst="triangle">
-            <a:avLst/>
-          </a:prstGeom>
-          <a:solidFill>
-            <a:srgbClr val="0D9488"/>
-          </a:solidFill>
-          <a:ln>
-            <a:noFill/>
-          </a:ln>
-          <a:effectLst/>
-        </p:spPr>
-        <p:style>
-          <a:lnRef idx="1">
-            <a:schemeClr val="accent1"/>
-          </a:lnRef>
-          <a:fillRef idx="3">
-            <a:schemeClr val="accent1"/>
-          </a:fillRef>
-          <a:effectRef idx="2">
-            <a:schemeClr val="accent1"/>
-          </a:effectRef>
-          <a:fontRef idx="minor">
-            <a:schemeClr val="lt1"/>
-          </a:fontRef>
-        </p:style>
-        <p:txBody>
-          <a:bodyPr rtlCol="0" anchor="ctr"/>
-          <a:lstStyle/>
-          <a:p>
-            <a:pPr algn="ctr"/>
-          </a:p>
-        </p:txBody>
-      </p:sp>
-      <p:sp>
-        <p:nvSpPr>
-          <p:cNvPr id="12" name="Oval 11"/>
-          <p:cNvSpPr/>
-          <p:nvPr/>
-        </p:nvSpPr>
-        <p:spPr>
-          <a:xfrm>
-            <a:off x="2040940" y="1481328"/>
-            <a:ext cx="530352" cy="530352"/>
-          </a:xfrm>
-          <a:prstGeom prst="ellipse">
-            <a:avLst/>
-          </a:prstGeom>
-          <a:solidFill>
-            <a:srgbClr val="0D9488"/>
-          </a:solidFill>
-          <a:ln>
-            <a:noFill/>
-          </a:ln>
-          <a:effectLst/>
-        </p:spPr>
-        <p:style>
-          <a:lnRef idx="1">
-            <a:schemeClr val="accent1"/>
-          </a:lnRef>
-          <a:fillRef idx="3">
-            <a:schemeClr val="accent1"/>
-          </a:fillRef>
-          <a:effectRef idx="2">
-            <a:schemeClr val="accent1"/>
-          </a:effectRef>
-          <a:fontRef idx="minor">
-            <a:schemeClr val="lt1"/>
-          </a:fontRef>
-        </p:style>
-        <p:txBody>
-          <a:bodyPr rtlCol="0" anchor="ctr"/>
-          <a:lstStyle/>
-          <a:p>
-            <a:pPr algn="ctr"/>
-          </a:p>
-        </p:txBody>
-      </p:sp>
-      <p:sp>
-        <p:nvSpPr>
-          <p:cNvPr id="13" name="TextBox 12"/>
+          <p:cNvPr id="10" name="TextBox 9"/>
           <p:cNvSpPr txBox="1"/>
           <p:nvPr/>
         </p:nvSpPr>
@@ -7106,7 +6974,7 @@
       </p:sp>
       <p:sp>
         <p:nvSpPr>
-          <p:cNvPr id="14" name="Rounded Rectangle 13"/>
+          <p:cNvPr id="11" name="Rounded Rectangle 10"/>
           <p:cNvSpPr/>
           <p:nvPr/>
         </p:nvSpPr>
@@ -7154,7 +7022,7 @@
       </p:sp>
       <p:sp>
         <p:nvSpPr>
-          <p:cNvPr id="15" name="TextBox 14"/>
+          <p:cNvPr id="12" name="TextBox 11"/>
           <p:cNvSpPr txBox="1"/>
           <p:nvPr/>
         </p:nvSpPr>
@@ -7189,7 +7057,7 @@
       </p:sp>
       <p:sp>
         <p:nvSpPr>
-          <p:cNvPr id="16" name="TextBox 15"/>
+          <p:cNvPr id="13" name="TextBox 12"/>
           <p:cNvSpPr txBox="1"/>
           <p:nvPr/>
         </p:nvSpPr>
@@ -7228,7 +7096,7 @@
       </p:sp>
       <p:sp>
         <p:nvSpPr>
-          <p:cNvPr id="17" name="Oval 16"/>
+          <p:cNvPr id="14" name="Oval 13"/>
           <p:cNvSpPr/>
           <p:nvPr/>
         </p:nvSpPr>
@@ -7272,7 +7140,7 @@
       </p:sp>
       <p:sp>
         <p:nvSpPr>
-          <p:cNvPr id="18" name="TextBox 17"/>
+          <p:cNvPr id="15" name="TextBox 14"/>
           <p:cNvSpPr txBox="1"/>
           <p:nvPr/>
         </p:nvSpPr>
@@ -7307,7 +7175,7 @@
       </p:sp>
       <p:sp>
         <p:nvSpPr>
-          <p:cNvPr id="19" name="Rounded Rectangle 18"/>
+          <p:cNvPr id="16" name="Rounded Rectangle 15"/>
           <p:cNvSpPr/>
           <p:nvPr/>
         </p:nvSpPr>
@@ -7355,7 +7223,7 @@
       </p:sp>
       <p:sp>
         <p:nvSpPr>
-          <p:cNvPr id="20" name="TextBox 19"/>
+          <p:cNvPr id="17" name="TextBox 16"/>
           <p:cNvSpPr txBox="1"/>
           <p:nvPr/>
         </p:nvSpPr>
@@ -7390,7 +7258,7 @@
       </p:sp>
       <p:sp>
         <p:nvSpPr>
-          <p:cNvPr id="21" name="TextBox 20"/>
+          <p:cNvPr id="18" name="TextBox 17"/>
           <p:cNvSpPr txBox="1"/>
           <p:nvPr/>
         </p:nvSpPr>
@@ -7429,7 +7297,7 @@
       </p:sp>
       <p:sp>
         <p:nvSpPr>
-          <p:cNvPr id="22" name="Oval 21"/>
+          <p:cNvPr id="19" name="Oval 18"/>
           <p:cNvSpPr/>
           <p:nvPr/>
         </p:nvSpPr>
@@ -7473,7 +7341,7 @@
       </p:sp>
       <p:sp>
         <p:nvSpPr>
-          <p:cNvPr id="23" name="TextBox 22"/>
+          <p:cNvPr id="20" name="TextBox 19"/>
           <p:cNvSpPr txBox="1"/>
           <p:nvPr/>
         </p:nvSpPr>
@@ -7508,7 +7376,7 @@
       </p:sp>
       <p:sp>
         <p:nvSpPr>
-          <p:cNvPr id="24" name="Rounded Rectangle 23"/>
+          <p:cNvPr id="21" name="Rounded Rectangle 20"/>
           <p:cNvSpPr/>
           <p:nvPr/>
         </p:nvSpPr>
@@ -7556,7 +7424,7 @@
       </p:sp>
       <p:sp>
         <p:nvSpPr>
-          <p:cNvPr id="25" name="TextBox 24"/>
+          <p:cNvPr id="22" name="TextBox 21"/>
           <p:cNvSpPr txBox="1"/>
           <p:nvPr/>
         </p:nvSpPr>
@@ -7591,7 +7459,7 @@
       </p:sp>
       <p:sp>
         <p:nvSpPr>
-          <p:cNvPr id="26" name="TextBox 25"/>
+          <p:cNvPr id="23" name="TextBox 22"/>
           <p:cNvSpPr txBox="1"/>
           <p:nvPr/>
         </p:nvSpPr>
@@ -7630,7 +7498,7 @@
       </p:sp>
       <p:sp>
         <p:nvSpPr>
-          <p:cNvPr id="27" name="Oval 26"/>
+          <p:cNvPr id="24" name="Oval 23"/>
           <p:cNvSpPr/>
           <p:nvPr/>
         </p:nvSpPr>
@@ -7674,7 +7542,7 @@
       </p:sp>
       <p:sp>
         <p:nvSpPr>
-          <p:cNvPr id="28" name="TextBox 27"/>
+          <p:cNvPr id="25" name="TextBox 24"/>
           <p:cNvSpPr txBox="1"/>
           <p:nvPr/>
         </p:nvSpPr>
@@ -7709,7 +7577,7 @@
       </p:sp>
       <p:sp>
         <p:nvSpPr>
-          <p:cNvPr id="29" name="Rounded Rectangle 28"/>
+          <p:cNvPr id="26" name="Rounded Rectangle 25"/>
           <p:cNvSpPr/>
           <p:nvPr/>
         </p:nvSpPr>
@@ -7757,7 +7625,7 @@
       </p:sp>
       <p:sp>
         <p:nvSpPr>
-          <p:cNvPr id="30" name="TextBox 29"/>
+          <p:cNvPr id="27" name="TextBox 26"/>
           <p:cNvSpPr txBox="1"/>
           <p:nvPr/>
         </p:nvSpPr>
@@ -7792,7 +7660,7 @@
       </p:sp>
       <p:sp>
         <p:nvSpPr>
-          <p:cNvPr id="31" name="TextBox 30"/>
+          <p:cNvPr id="28" name="TextBox 27"/>
           <p:cNvSpPr txBox="1"/>
           <p:nvPr/>
         </p:nvSpPr>
@@ -7831,7 +7699,7 @@
       </p:sp>
       <p:sp>
         <p:nvSpPr>
-          <p:cNvPr id="32" name="TextBox 31"/>
+          <p:cNvPr id="29" name="TextBox 28"/>
           <p:cNvSpPr txBox="1"/>
           <p:nvPr/>
         </p:nvSpPr>
@@ -7866,7 +7734,7 @@
       </p:sp>
       <p:sp>
         <p:nvSpPr>
-          <p:cNvPr id="33" name="TextBox 32"/>
+          <p:cNvPr id="30" name="TextBox 29"/>
           <p:cNvSpPr txBox="1"/>
           <p:nvPr/>
         </p:nvSpPr>
@@ -7901,7 +7769,7 @@
       </p:sp>
       <p:sp>
         <p:nvSpPr>
-          <p:cNvPr id="34" name="Rectangle 33"/>
+          <p:cNvPr id="31" name="Rectangle 30"/>
           <p:cNvSpPr/>
           <p:nvPr/>
         </p:nvSpPr>
@@ -8425,7 +8293,7 @@
           <a:p>
             <a:pPr>
               <a:lnSpc>
-                <a:spcPct val="115000"/>
+                <a:spcPct val="149500"/>
               </a:lnSpc>
             </a:pPr>
             <a:r>
@@ -8450,7 +8318,7 @@
           <a:p>
             <a:pPr>
               <a:lnSpc>
-                <a:spcPct val="115000"/>
+                <a:spcPct val="149500"/>
               </a:lnSpc>
             </a:pPr>
             <a:r>
@@ -8475,7 +8343,7 @@
           <a:p>
             <a:pPr>
               <a:lnSpc>
-                <a:spcPct val="115000"/>
+                <a:spcPct val="149500"/>
               </a:lnSpc>
             </a:pPr>
             <a:r>
@@ -9095,7 +8963,7 @@
           <a:p>
             <a:pPr>
               <a:lnSpc>
-                <a:spcPct val="115000"/>
+                <a:spcPct val="149500"/>
               </a:lnSpc>
             </a:pPr>
             <a:r>
@@ -9120,7 +8988,7 @@
           <a:p>
             <a:pPr>
               <a:lnSpc>
-                <a:spcPct val="115000"/>
+                <a:spcPct val="149500"/>
               </a:lnSpc>
             </a:pPr>
             <a:r>
@@ -9145,7 +9013,7 @@
           <a:p>
             <a:pPr>
               <a:lnSpc>
-                <a:spcPct val="115000"/>
+                <a:spcPct val="149500"/>
               </a:lnSpc>
             </a:pPr>
             <a:r>
@@ -9650,7 +9518,7 @@
           <a:p>
             <a:pPr>
               <a:lnSpc>
-                <a:spcPct val="115000"/>
+                <a:spcPct val="149500"/>
               </a:lnSpc>
             </a:pPr>
             <a:r>
@@ -9675,7 +9543,7 @@
           <a:p>
             <a:pPr>
               <a:lnSpc>
-                <a:spcPct val="115000"/>
+                <a:spcPct val="149500"/>
               </a:lnSpc>
             </a:pPr>
             <a:r>
@@ -9700,7 +9568,7 @@
           <a:p>
             <a:pPr>
               <a:lnSpc>
-                <a:spcPct val="115000"/>
+                <a:spcPct val="149500"/>
               </a:lnSpc>
             </a:pPr>
             <a:r>
@@ -10091,7 +9959,7 @@
           <a:p>
             <a:pPr>
               <a:lnSpc>
-                <a:spcPct val="115000"/>
+                <a:spcPct val="149500"/>
               </a:lnSpc>
             </a:pPr>
             <a:r>
@@ -10116,7 +9984,7 @@
           <a:p>
             <a:pPr>
               <a:lnSpc>
-                <a:spcPct val="115000"/>
+                <a:spcPct val="149500"/>
               </a:lnSpc>
             </a:pPr>
             <a:r>
@@ -10141,7 +10009,7 @@
           <a:p>
             <a:pPr>
               <a:lnSpc>
-                <a:spcPct val="115000"/>
+                <a:spcPct val="149500"/>
               </a:lnSpc>
             </a:pPr>
             <a:r>
@@ -10166,13 +10034,13 @@
           <a:p>
             <a:pPr>
               <a:lnSpc>
-                <a:spcPct val="115000"/>
+                <a:spcPct val="149500"/>
               </a:lnSpc>
             </a:pPr>
             <a:r>
               <a:rPr sz="1700" b="1">
                 <a:solidFill>
-                  <a:srgbClr val="0D9488"/>
+                  <a:srgbClr val="DC2626"/>
                 </a:solidFill>
                 <a:latin typeface="맑은 고딕"/>
               </a:rPr>
@@ -10185,13 +10053,13 @@
                 </a:solidFill>
                 <a:latin typeface="맑은 고딕"/>
               </a:rPr>
-              <a:t>⚠ 새 Pod가 Running 상태가 될 때까지 10~20초 정도 대기 필요</a:t>
+              <a:t>새 Pod가 Running 상태가 될 때까지 10~20초 정도 대기 필요</a:t>
             </a:r>
           </a:p>
           <a:p>
             <a:pPr>
               <a:lnSpc>
-                <a:spcPct val="115000"/>
+                <a:spcPct val="149500"/>
               </a:lnSpc>
             </a:pPr>
             <a:r>

--- a/class/cloud_infra_mgmt/06주차_Kubernetes핵심2/01_강의자료/3차시_MySQL데이터영속성검증.pptx
+++ b/class/cloud_infra_mgmt/06주차_Kubernetes핵심2/01_강의자료/3차시_MySQL데이터영속성검증.pptx
@@ -4885,6 +4885,8 @@
                   <a:srgbClr val="14B8A6"/>
                 </a:solidFill>
                 <a:latin typeface="맑은 고딕"/>
+                <a:ea typeface="맑은 고딕"/>
+                <a:cs typeface="맑은 고딕"/>
               </a:rPr>
               <a:t>클라우드인프라관리  ·  6주차 3차시</a:t>
             </a:r>
@@ -4920,6 +4922,8 @@
                   <a:srgbClr val="FFFFFF"/>
                 </a:solidFill>
                 <a:latin typeface="맑은 고딕"/>
+                <a:ea typeface="맑은 고딕"/>
+                <a:cs typeface="맑은 고딕"/>
               </a:rPr>
               <a:t>MySQL로 데이터 영속성 검증하기</a:t>
             </a:r>
@@ -4955,6 +4959,8 @@
                   <a:srgbClr val="C9D3E6"/>
                 </a:solidFill>
                 <a:latin typeface="맑은 고딕"/>
+                <a:ea typeface="맑은 고딕"/>
+                <a:cs typeface="맑은 고딕"/>
               </a:rPr>
               <a:t>PV/PVC를 실제 데이터베이스에 연결하기</a:t>
             </a:r>
@@ -4990,6 +4996,8 @@
                   <a:srgbClr val="FFFFFF"/>
                 </a:solidFill>
                 <a:latin typeface="맑은 고딕"/>
+                <a:ea typeface="맑은 고딕"/>
+                <a:cs typeface="맑은 고딕"/>
               </a:rPr>
               <a:t>영남이공대학교 김지윤교수</a:t>
             </a:r>
@@ -5149,6 +5157,8 @@
                   <a:srgbClr val="14213D"/>
                 </a:solidFill>
                 <a:latin typeface="맑은 고딕"/>
+                <a:ea typeface="맑은 고딕"/>
+                <a:cs typeface="맑은 고딕"/>
               </a:rPr>
               <a:t>03</a:t>
             </a:r>
@@ -5184,6 +5194,8 @@
                   <a:srgbClr val="14B8A6"/>
                 </a:solidFill>
                 <a:latin typeface="맑은 고딕"/>
+                <a:ea typeface="맑은 고딕"/>
+                <a:cs typeface="맑은 고딕"/>
               </a:rPr>
               <a:t>실습 안내</a:t>
             </a:r>
@@ -5219,6 +5231,8 @@
                   <a:srgbClr val="FFFFFF"/>
                 </a:solidFill>
                 <a:latin typeface="맑은 고딕"/>
+                <a:ea typeface="맑은 고딕"/>
+                <a:cs typeface="맑은 고딕"/>
               </a:rPr>
               <a:t>VM 안내 및 6주차 종합 제출</a:t>
             </a:r>
@@ -5258,6 +5272,8 @@
                   <a:srgbClr val="0D9488"/>
                 </a:solidFill>
                 <a:latin typeface="맑은 고딕"/>
+                <a:ea typeface="맑은 고딕"/>
+                <a:cs typeface="맑은 고딕"/>
               </a:rPr>
               <a:t>●  </a:t>
             </a:r>
@@ -5267,6 +5283,8 @@
                   <a:srgbClr val="222733"/>
                 </a:solidFill>
                 <a:latin typeface="맑은 고딕"/>
+                <a:ea typeface="맑은 고딕"/>
+                <a:cs typeface="맑은 고딕"/>
               </a:rPr>
               <a:t>개인 VM에서 동일한 절차로 MySQL 배포 및 영속성 검증</a:t>
             </a:r>
@@ -5283,6 +5301,8 @@
                   <a:srgbClr val="0D9488"/>
                 </a:solidFill>
                 <a:latin typeface="맑은 고딕"/>
+                <a:ea typeface="맑은 고딕"/>
+                <a:cs typeface="맑은 고딕"/>
               </a:rPr>
               <a:t>●  </a:t>
             </a:r>
@@ -5292,6 +5312,8 @@
                   <a:srgbClr val="222733"/>
                 </a:solidFill>
                 <a:latin typeface="맑은 고딕"/>
+                <a:ea typeface="맑은 고딕"/>
+                <a:cs typeface="맑은 고딕"/>
               </a:rPr>
               <a:t>삭제 전/후 SELECT 결과를 모두 캡처 (데이터 동일함을 증명)</a:t>
             </a:r>
@@ -5308,6 +5330,8 @@
                   <a:srgbClr val="0D9488"/>
                 </a:solidFill>
                 <a:latin typeface="맑은 고딕"/>
+                <a:ea typeface="맑은 고딕"/>
+                <a:cs typeface="맑은 고딕"/>
               </a:rPr>
               <a:t>●  </a:t>
             </a:r>
@@ -5317,6 +5341,8 @@
                   <a:srgbClr val="222733"/>
                 </a:solidFill>
                 <a:latin typeface="맑은 고딕"/>
+                <a:ea typeface="맑은 고딕"/>
+                <a:cs typeface="맑은 고딕"/>
               </a:rPr>
               <a:t>6주차 1~3차시(ConfigMap/Secret, PV/PVC, MySQL 영속성) 실습을 종합해서 제출</a:t>
             </a:r>
@@ -5352,6 +5378,8 @@
                   <a:srgbClr val="5B6373"/>
                 </a:solidFill>
                 <a:latin typeface="맑은 고딕"/>
+                <a:ea typeface="맑은 고딕"/>
+                <a:cs typeface="맑은 고딕"/>
               </a:rPr>
               <a:t>클라우드인프라관리  ·  6주차 3차시</a:t>
             </a:r>
@@ -5387,6 +5415,8 @@
                   <a:srgbClr val="5B6373"/>
                 </a:solidFill>
                 <a:latin typeface="맑은 고딕"/>
+                <a:ea typeface="맑은 고딕"/>
+                <a:cs typeface="맑은 고딕"/>
               </a:rPr>
               <a:t>10 / 12</a:t>
             </a:r>
@@ -5572,6 +5602,8 @@
                   <a:srgbClr val="FFFFFF"/>
                 </a:solidFill>
                 <a:latin typeface="맑은 고딕"/>
+                <a:ea typeface="맑은 고딕"/>
+                <a:cs typeface="맑은 고딕"/>
               </a:rPr>
               <a:t>오늘의 정리</a:t>
             </a:r>
@@ -5625,6 +5657,8 @@
                   <a:srgbClr val="14213D"/>
                 </a:solidFill>
                 <a:latin typeface="맑은 고딕"/>
+                <a:ea typeface="맑은 고딕"/>
+                <a:cs typeface="맑은 고딕"/>
               </a:rPr>
               <a:t>1</a:t>
             </a:r>
@@ -5660,6 +5694,8 @@
                   <a:srgbClr val="FFFFFF"/>
                 </a:solidFill>
                 <a:latin typeface="맑은 고딕"/>
+                <a:ea typeface="맑은 고딕"/>
+                <a:cs typeface="맑은 고딕"/>
               </a:rPr>
               <a:t>PVC를 Pod의 volumeMounts에 연결하면 컨테이너 데이터가 hostPath에 실제로 저장된다</a:t>
             </a:r>
@@ -5713,6 +5749,8 @@
                   <a:srgbClr val="14213D"/>
                 </a:solidFill>
                 <a:latin typeface="맑은 고딕"/>
+                <a:ea typeface="맑은 고딕"/>
+                <a:cs typeface="맑은 고딕"/>
               </a:rPr>
               <a:t>2</a:t>
             </a:r>
@@ -5748,6 +5786,8 @@
                   <a:srgbClr val="FFFFFF"/>
                 </a:solidFill>
                 <a:latin typeface="맑은 고딕"/>
+                <a:ea typeface="맑은 고딕"/>
+                <a:cs typeface="맑은 고딕"/>
               </a:rPr>
               <a:t>Pod가 재생성되어도 PV에 저장된 데이터는 그대로 유지된다</a:t>
             </a:r>
@@ -5889,6 +5929,8 @@
                   <a:srgbClr val="FFFFFF"/>
                 </a:solidFill>
                 <a:latin typeface="맑은 고딕"/>
+                <a:ea typeface="맑은 고딕"/>
+                <a:cs typeface="맑은 고딕"/>
               </a:rPr>
               <a:t>다음 주 예고</a:t>
             </a:r>
@@ -5924,6 +5966,8 @@
                   <a:srgbClr val="14B8A6"/>
                 </a:solidFill>
                 <a:latin typeface="맑은 고딕"/>
+                <a:ea typeface="맑은 고딕"/>
+                <a:cs typeface="맑은 고딕"/>
               </a:rPr>
               <a:t>다음 차시 예고 — 7주차 — Ingress와 자가치유</a:t>
             </a:r>
@@ -5959,6 +6003,8 @@
                   <a:srgbClr val="FFFFFF"/>
                 </a:solidFill>
                 <a:latin typeface="맑은 고딕"/>
+                <a:ea typeface="맑은 고딕"/>
+                <a:cs typeface="맑은 고딕"/>
               </a:rPr>
               <a:t>여러 Service를 하나의 진입점으로 묶는 Ingress, 그리고 K8s가 장애 상황에서 스스로 복구하는 자가치유 능력을 배우며 4~7주차를 정리합니다.</a:t>
             </a:r>
@@ -6144,6 +6190,8 @@
                   <a:srgbClr val="14B8A6"/>
                 </a:solidFill>
                 <a:latin typeface="맑은 고딕"/>
+                <a:ea typeface="맑은 고딕"/>
+                <a:cs typeface="맑은 고딕"/>
               </a:rPr>
               <a:t>6주차를 마치며</a:t>
             </a:r>
@@ -6179,6 +6227,8 @@
                   <a:srgbClr val="FFFFFF"/>
                 </a:solidFill>
                 <a:latin typeface="맑은 고딕"/>
+                <a:ea typeface="맑은 고딕"/>
+                <a:cs typeface="맑은 고딕"/>
               </a:rPr>
               <a:t>수고하셨습니다!</a:t>
             </a:r>
@@ -6218,6 +6268,8 @@
                   <a:srgbClr val="C9D3E6"/>
                 </a:solidFill>
                 <a:latin typeface="맑은 고딕"/>
+                <a:ea typeface="맑은 고딕"/>
+                <a:cs typeface="맑은 고딕"/>
               </a:rPr>
               <a:t>설정 분리(ConfigMap/Secret)부터 데이터 영속성(PV/PVC)까지, MySQL을 직접 다루며 K8s 상태 관리를 완주하셨습니다.</a:t>
             </a:r>
@@ -6359,6 +6411,8 @@
                   <a:srgbClr val="14B8A6"/>
                 </a:solidFill>
                 <a:latin typeface="맑은 고딕"/>
+                <a:ea typeface="맑은 고딕"/>
+                <a:cs typeface="맑은 고딕"/>
               </a:rPr>
               <a:t>SESSION OVERVIEW</a:t>
             </a:r>
@@ -6394,6 +6448,8 @@
                   <a:srgbClr val="FFFFFF"/>
                 </a:solidFill>
                 <a:latin typeface="맑은 고딕"/>
+                <a:ea typeface="맑은 고딕"/>
+                <a:cs typeface="맑은 고딕"/>
               </a:rPr>
               <a:t>오늘의 학습 목표</a:t>
             </a:r>
@@ -6433,6 +6489,8 @@
                   <a:srgbClr val="222733"/>
                 </a:solidFill>
                 <a:latin typeface="맑은 고딕"/>
+                <a:ea typeface="맑은 고딕"/>
+                <a:cs typeface="맑은 고딕"/>
               </a:rPr>
               <a:t>1.  PVC를 MySQL Pod에 연결하는 방법을 이해한다</a:t>
             </a:r>
@@ -6449,6 +6507,8 @@
                   <a:srgbClr val="222733"/>
                 </a:solidFill>
                 <a:latin typeface="맑은 고딕"/>
+                <a:ea typeface="맑은 고딕"/>
+                <a:cs typeface="맑은 고딕"/>
               </a:rPr>
               <a:t>2.  MySQL Pod를 배포하고 데이터를 직접 저장해본다</a:t>
             </a:r>
@@ -6465,6 +6525,8 @@
                   <a:srgbClr val="222733"/>
                 </a:solidFill>
                 <a:latin typeface="맑은 고딕"/>
+                <a:ea typeface="맑은 고딕"/>
+                <a:cs typeface="맑은 고딕"/>
               </a:rPr>
               <a:t>3.  Pod를 재시작해도 데이터가 유지되는지 직접 확인한다</a:t>
             </a:r>
@@ -6500,6 +6562,8 @@
                   <a:srgbClr val="5B6373"/>
                 </a:solidFill>
                 <a:latin typeface="맑은 고딕"/>
+                <a:ea typeface="맑은 고딕"/>
+                <a:cs typeface="맑은 고딕"/>
               </a:rPr>
               <a:t>클라우드인프라관리  ·  6주차 3차시</a:t>
             </a:r>
@@ -6535,6 +6599,8 @@
                   <a:srgbClr val="5B6373"/>
                 </a:solidFill>
                 <a:latin typeface="맑은 고딕"/>
+                <a:ea typeface="맑은 고딕"/>
+                <a:cs typeface="맑은 고딕"/>
               </a:rPr>
               <a:t>02 / 12</a:t>
             </a:r>
@@ -6720,6 +6786,8 @@
                   <a:srgbClr val="14B8A6"/>
                 </a:solidFill>
                 <a:latin typeface="맑은 고딕"/>
+                <a:ea typeface="맑은 고딕"/>
+                <a:cs typeface="맑은 고딕"/>
               </a:rPr>
               <a:t>SESSION OVERVIEW</a:t>
             </a:r>
@@ -6755,6 +6823,8 @@
                   <a:srgbClr val="FFFFFF"/>
                 </a:solidFill>
                 <a:latin typeface="맑은 고딕"/>
+                <a:ea typeface="맑은 고딕"/>
+                <a:cs typeface="맑은 고딕"/>
               </a:rPr>
               <a:t>오늘의 진행 순서</a:t>
             </a:r>
@@ -6966,6 +7036,8 @@
                   <a:srgbClr val="FFFFFF"/>
                 </a:solidFill>
                 <a:latin typeface="맑은 고딕"/>
+                <a:ea typeface="맑은 고딕"/>
+                <a:cs typeface="맑은 고딕"/>
               </a:rPr>
               <a:t>1</a:t>
             </a:r>
@@ -7049,6 +7121,8 @@
                   <a:srgbClr val="14213D"/>
                 </a:solidFill>
                 <a:latin typeface="맑은 고딕"/>
+                <a:ea typeface="맑은 고딕"/>
+                <a:cs typeface="맑은 고딕"/>
               </a:rPr>
               <a:t>개념 설명</a:t>
             </a:r>
@@ -7088,6 +7162,8 @@
                   <a:srgbClr val="222733"/>
                 </a:solidFill>
                 <a:latin typeface="맑은 고딕"/>
+                <a:ea typeface="맑은 고딕"/>
+                <a:cs typeface="맑은 고딕"/>
               </a:rPr>
               <a:t>강의자료 기반 직접 강의</a:t>
             </a:r>
@@ -7167,6 +7243,8 @@
                   <a:srgbClr val="FFFFFF"/>
                 </a:solidFill>
                 <a:latin typeface="맑은 고딕"/>
+                <a:ea typeface="맑은 고딕"/>
+                <a:cs typeface="맑은 고딕"/>
               </a:rPr>
               <a:t>2</a:t>
             </a:r>
@@ -7250,6 +7328,8 @@
                   <a:srgbClr val="14213D"/>
                 </a:solidFill>
                 <a:latin typeface="맑은 고딕"/>
+                <a:ea typeface="맑은 고딕"/>
+                <a:cs typeface="맑은 고딕"/>
               </a:rPr>
               <a:t>Killercoda</a:t>
             </a:r>
@@ -7289,6 +7369,8 @@
                   <a:srgbClr val="222733"/>
                 </a:solidFill>
                 <a:latin typeface="맑은 고딕"/>
+                <a:ea typeface="맑은 고딕"/>
+                <a:cs typeface="맑은 고딕"/>
               </a:rPr>
               <a:t>MySQL 배포+영속성 검증</a:t>
             </a:r>
@@ -7368,6 +7450,8 @@
                   <a:srgbClr val="FFFFFF"/>
                 </a:solidFill>
                 <a:latin typeface="맑은 고딕"/>
+                <a:ea typeface="맑은 고딕"/>
+                <a:cs typeface="맑은 고딕"/>
               </a:rPr>
               <a:t>3</a:t>
             </a:r>
@@ -7451,6 +7535,8 @@
                   <a:srgbClr val="14213D"/>
                 </a:solidFill>
                 <a:latin typeface="맑은 고딕"/>
+                <a:ea typeface="맑은 고딕"/>
+                <a:cs typeface="맑은 고딕"/>
               </a:rPr>
               <a:t>VM 안내</a:t>
             </a:r>
@@ -7490,6 +7576,8 @@
                   <a:srgbClr val="222733"/>
                 </a:solidFill>
                 <a:latin typeface="맑은 고딕"/>
+                <a:ea typeface="맑은 고딕"/>
+                <a:cs typeface="맑은 고딕"/>
               </a:rPr>
               <a:t>VM에서 동일 실습</a:t>
             </a:r>
@@ -7569,6 +7657,8 @@
                   <a:srgbClr val="FFFFFF"/>
                 </a:solidFill>
                 <a:latin typeface="맑은 고딕"/>
+                <a:ea typeface="맑은 고딕"/>
+                <a:cs typeface="맑은 고딕"/>
               </a:rPr>
               <a:t>4</a:t>
             </a:r>
@@ -7652,6 +7742,8 @@
                   <a:srgbClr val="14213D"/>
                 </a:solidFill>
                 <a:latin typeface="맑은 고딕"/>
+                <a:ea typeface="맑은 고딕"/>
+                <a:cs typeface="맑은 고딕"/>
               </a:rPr>
               <a:t>결과 제출</a:t>
             </a:r>
@@ -7691,6 +7783,8 @@
                   <a:srgbClr val="222733"/>
                 </a:solidFill>
                 <a:latin typeface="맑은 고딕"/>
+                <a:ea typeface="맑은 고딕"/>
+                <a:cs typeface="맑은 고딕"/>
               </a:rPr>
               <a:t>6주차 종합 제출</a:t>
             </a:r>
@@ -7726,6 +7820,8 @@
                   <a:srgbClr val="5B6373"/>
                 </a:solidFill>
                 <a:latin typeface="맑은 고딕"/>
+                <a:ea typeface="맑은 고딕"/>
+                <a:cs typeface="맑은 고딕"/>
               </a:rPr>
               <a:t>클라우드인프라관리  ·  6주차 3차시</a:t>
             </a:r>
@@ -7761,6 +7857,8 @@
                   <a:srgbClr val="5B6373"/>
                 </a:solidFill>
                 <a:latin typeface="맑은 고딕"/>
+                <a:ea typeface="맑은 고딕"/>
+                <a:cs typeface="맑은 고딕"/>
               </a:rPr>
               <a:t>03 / 12</a:t>
             </a:r>
@@ -7964,6 +8062,8 @@
                   <a:srgbClr val="14213D"/>
                 </a:solidFill>
                 <a:latin typeface="맑은 고딕"/>
+                <a:ea typeface="맑은 고딕"/>
+                <a:cs typeface="맑은 고딕"/>
               </a:rPr>
               <a:t>PART 01</a:t>
             </a:r>
@@ -7999,6 +8099,8 @@
                   <a:srgbClr val="FFFFFF"/>
                 </a:solidFill>
                 <a:latin typeface="맑은 고딕"/>
+                <a:ea typeface="맑은 고딕"/>
+                <a:cs typeface="맑은 고딕"/>
               </a:rPr>
               <a:t>PVC를 Pod에 연결하기</a:t>
             </a:r>
@@ -8034,6 +8136,8 @@
                   <a:srgbClr val="C9D3E6"/>
                 </a:solidFill>
                 <a:latin typeface="맑은 고딕"/>
+                <a:ea typeface="맑은 고딕"/>
+                <a:cs typeface="맑은 고딕"/>
               </a:rPr>
               <a:t>지난 시간에 만든 PV/PVC 재사용</a:t>
             </a:r>
@@ -8193,6 +8297,8 @@
                   <a:srgbClr val="14213D"/>
                 </a:solidFill>
                 <a:latin typeface="맑은 고딕"/>
+                <a:ea typeface="맑은 고딕"/>
+                <a:cs typeface="맑은 고딕"/>
               </a:rPr>
               <a:t>01</a:t>
             </a:r>
@@ -8228,6 +8334,8 @@
                   <a:srgbClr val="14B8A6"/>
                 </a:solidFill>
                 <a:latin typeface="맑은 고딕"/>
+                <a:ea typeface="맑은 고딕"/>
+                <a:cs typeface="맑은 고딕"/>
               </a:rPr>
               <a:t>PART 1 · PVC 연결</a:t>
             </a:r>
@@ -8263,6 +8371,8 @@
                   <a:srgbClr val="FFFFFF"/>
                 </a:solidFill>
                 <a:latin typeface="맑은 고딕"/>
+                <a:ea typeface="맑은 고딕"/>
+                <a:cs typeface="맑은 고딕"/>
               </a:rPr>
               <a:t>Pod YAML에 PVC 붙이기</a:t>
             </a:r>
@@ -8302,6 +8412,8 @@
                   <a:srgbClr val="0D9488"/>
                 </a:solidFill>
                 <a:latin typeface="맑은 고딕"/>
+                <a:ea typeface="맑은 고딕"/>
+                <a:cs typeface="맑은 고딕"/>
               </a:rPr>
               <a:t>●  </a:t>
             </a:r>
@@ -8311,6 +8423,8 @@
                   <a:srgbClr val="222733"/>
                 </a:solidFill>
                 <a:latin typeface="맑은 고딕"/>
+                <a:ea typeface="맑은 고딕"/>
+                <a:cs typeface="맑은 고딕"/>
               </a:rPr>
               <a:t>지난 2차시에 만든 PVC를 Pod의 volumes에 지정</a:t>
             </a:r>
@@ -8327,6 +8441,8 @@
                   <a:srgbClr val="0D9488"/>
                 </a:solidFill>
                 <a:latin typeface="맑은 고딕"/>
+                <a:ea typeface="맑은 고딕"/>
+                <a:cs typeface="맑은 고딕"/>
               </a:rPr>
               <a:t>●  </a:t>
             </a:r>
@@ -8336,6 +8452,8 @@
                   <a:srgbClr val="222733"/>
                 </a:solidFill>
                 <a:latin typeface="맑은 고딕"/>
+                <a:ea typeface="맑은 고딕"/>
+                <a:cs typeface="맑은 고딕"/>
               </a:rPr>
               <a:t>volumeMounts로 컨테이너 안 특정 경로(예: /var/lib/mysql)에 연결</a:t>
             </a:r>
@@ -8352,6 +8470,8 @@
                   <a:srgbClr val="0D9488"/>
                 </a:solidFill>
                 <a:latin typeface="맑은 고딕"/>
+                <a:ea typeface="맑은 고딕"/>
+                <a:cs typeface="맑은 고딕"/>
               </a:rPr>
               <a:t>●  </a:t>
             </a:r>
@@ -8361,6 +8481,8 @@
                   <a:srgbClr val="222733"/>
                 </a:solidFill>
                 <a:latin typeface="맑은 고딕"/>
+                <a:ea typeface="맑은 고딕"/>
+                <a:cs typeface="맑은 고딕"/>
               </a:rPr>
               <a:t>이 순간부터 MySQL의 데이터 파일이 hostPath 디렉토리에 실제로 저장됨</a:t>
             </a:r>
@@ -8396,6 +8518,8 @@
                   <a:srgbClr val="5B6373"/>
                 </a:solidFill>
                 <a:latin typeface="맑은 고딕"/>
+                <a:ea typeface="맑은 고딕"/>
+                <a:cs typeface="맑은 고딕"/>
               </a:rPr>
               <a:t>클라우드인프라관리  ·  6주차 3차시</a:t>
             </a:r>
@@ -8431,6 +8555,8 @@
                   <a:srgbClr val="5B6373"/>
                 </a:solidFill>
                 <a:latin typeface="맑은 고딕"/>
+                <a:ea typeface="맑은 고딕"/>
+                <a:cs typeface="맑은 고딕"/>
               </a:rPr>
               <a:t>05 / 12</a:t>
             </a:r>
@@ -8634,6 +8760,8 @@
                   <a:srgbClr val="14213D"/>
                 </a:solidFill>
                 <a:latin typeface="맑은 고딕"/>
+                <a:ea typeface="맑은 고딕"/>
+                <a:cs typeface="맑은 고딕"/>
               </a:rPr>
               <a:t>PART 02</a:t>
             </a:r>
@@ -8669,6 +8797,8 @@
                   <a:srgbClr val="FFFFFF"/>
                 </a:solidFill>
                 <a:latin typeface="맑은 고딕"/>
+                <a:ea typeface="맑은 고딕"/>
+                <a:cs typeface="맑은 고딕"/>
               </a:rPr>
               <a:t>MySQL 배포와 영속성 검증</a:t>
             </a:r>
@@ -8704,6 +8834,8 @@
                   <a:srgbClr val="C9D3E6"/>
                 </a:solidFill>
                 <a:latin typeface="맑은 고딕"/>
+                <a:ea typeface="맑은 고딕"/>
+                <a:cs typeface="맑은 고딕"/>
               </a:rPr>
               <a:t>실제로 재시작해서 눈으로 확인한다</a:t>
             </a:r>
@@ -8863,6 +8995,8 @@
                   <a:srgbClr val="14213D"/>
                 </a:solidFill>
                 <a:latin typeface="맑은 고딕"/>
+                <a:ea typeface="맑은 고딕"/>
+                <a:cs typeface="맑은 고딕"/>
               </a:rPr>
               <a:t>02</a:t>
             </a:r>
@@ -8898,6 +9032,8 @@
                   <a:srgbClr val="14B8A6"/>
                 </a:solidFill>
                 <a:latin typeface="맑은 고딕"/>
+                <a:ea typeface="맑은 고딕"/>
+                <a:cs typeface="맑은 고딕"/>
               </a:rPr>
               <a:t>PART 2 · MySQL 배포</a:t>
             </a:r>
@@ -8933,6 +9069,8 @@
                   <a:srgbClr val="FFFFFF"/>
                 </a:solidFill>
                 <a:latin typeface="맑은 고딕"/>
+                <a:ea typeface="맑은 고딕"/>
+                <a:cs typeface="맑은 고딕"/>
               </a:rPr>
               <a:t>MySQL Pod 배포하기</a:t>
             </a:r>
@@ -8972,6 +9110,8 @@
                   <a:srgbClr val="0D9488"/>
                 </a:solidFill>
                 <a:latin typeface="맑은 고딕"/>
+                <a:ea typeface="맑은 고딕"/>
+                <a:cs typeface="맑은 고딕"/>
               </a:rPr>
               <a:t>●  </a:t>
             </a:r>
@@ -8981,6 +9121,8 @@
                   <a:srgbClr val="222733"/>
                 </a:solidFill>
                 <a:latin typeface="맑은 고딕"/>
+                <a:ea typeface="맑은 고딕"/>
+                <a:cs typeface="맑은 고딕"/>
               </a:rPr>
               <a:t>공식 mysql 이미지 사용, 환경변수로 MYSQL_ROOT_PASSWORD 지정</a:t>
             </a:r>
@@ -8997,6 +9139,8 @@
                   <a:srgbClr val="0D9488"/>
                 </a:solidFill>
                 <a:latin typeface="맑은 고딕"/>
+                <a:ea typeface="맑은 고딕"/>
+                <a:cs typeface="맑은 고딕"/>
               </a:rPr>
               <a:t>●  </a:t>
             </a:r>
@@ -9006,6 +9150,8 @@
                   <a:srgbClr val="222733"/>
                 </a:solidFill>
                 <a:latin typeface="맑은 고딕"/>
+                <a:ea typeface="맑은 고딕"/>
+                <a:cs typeface="맑은 고딕"/>
               </a:rPr>
               <a:t>1차시에서 배운 Secret으로 비밀번호를 관리하면 더 안전함</a:t>
             </a:r>
@@ -9022,6 +9168,8 @@
                   <a:srgbClr val="0D9488"/>
                 </a:solidFill>
                 <a:latin typeface="맑은 고딕"/>
+                <a:ea typeface="맑은 고딕"/>
+                <a:cs typeface="맑은 고딕"/>
               </a:rPr>
               <a:t>●  </a:t>
             </a:r>
@@ -9031,6 +9179,8 @@
                   <a:srgbClr val="222733"/>
                 </a:solidFill>
                 <a:latin typeface="맑은 고딕"/>
+                <a:ea typeface="맑은 고딕"/>
+                <a:cs typeface="맑은 고딕"/>
               </a:rPr>
               <a:t>PVC를 /var/lib/mysql(MySQL의 실제 데이터 저장 경로)에 마운트</a:t>
             </a:r>
@@ -9110,6 +9260,8 @@
                   <a:srgbClr val="FFFFFF"/>
                 </a:solidFill>
                 <a:latin typeface="맑은 고딕"/>
+                <a:ea typeface="맑은 고딕"/>
+                <a:cs typeface="맑은 고딕"/>
               </a:rPr>
               <a:t>🔗  오늘까지 배운 6주차 내용이 하나로 연결됨</a:t>
             </a:r>
@@ -9145,6 +9297,8 @@
                   <a:srgbClr val="FFFFFF"/>
                 </a:solidFill>
                 <a:latin typeface="맑은 고딕"/>
+                <a:ea typeface="맑은 고딕"/>
+                <a:cs typeface="맑은 고딕"/>
               </a:rPr>
               <a:t>1차시 Secret(비밀번호 관리) + 2차시 PV/PVC(저장공간) = 3차시 MySQL 실전 배포</a:t>
             </a:r>
@@ -9180,6 +9334,8 @@
                   <a:srgbClr val="5B6373"/>
                 </a:solidFill>
                 <a:latin typeface="맑은 고딕"/>
+                <a:ea typeface="맑은 고딕"/>
+                <a:cs typeface="맑은 고딕"/>
               </a:rPr>
               <a:t>클라우드인프라관리  ·  6주차 3차시</a:t>
             </a:r>
@@ -9215,6 +9371,8 @@
                   <a:srgbClr val="5B6373"/>
                 </a:solidFill>
                 <a:latin typeface="맑은 고딕"/>
+                <a:ea typeface="맑은 고딕"/>
+                <a:cs typeface="맑은 고딕"/>
               </a:rPr>
               <a:t>07 / 12</a:t>
             </a:r>
@@ -9418,6 +9576,8 @@
                   <a:srgbClr val="14213D"/>
                 </a:solidFill>
                 <a:latin typeface="맑은 고딕"/>
+                <a:ea typeface="맑은 고딕"/>
+                <a:cs typeface="맑은 고딕"/>
               </a:rPr>
               <a:t>02</a:t>
             </a:r>
@@ -9453,6 +9613,8 @@
                   <a:srgbClr val="14B8A6"/>
                 </a:solidFill>
                 <a:latin typeface="맑은 고딕"/>
+                <a:ea typeface="맑은 고딕"/>
+                <a:cs typeface="맑은 고딕"/>
               </a:rPr>
               <a:t>PART 2 · MySQL 배포</a:t>
             </a:r>
@@ -9488,6 +9650,8 @@
                   <a:srgbClr val="FFFFFF"/>
                 </a:solidFill>
                 <a:latin typeface="맑은 고딕"/>
+                <a:ea typeface="맑은 고딕"/>
+                <a:cs typeface="맑은 고딕"/>
               </a:rPr>
               <a:t>영속성 검증 절차</a:t>
             </a:r>
@@ -9527,6 +9691,8 @@
                   <a:srgbClr val="0D9488"/>
                 </a:solidFill>
                 <a:latin typeface="맑은 고딕"/>
+                <a:ea typeface="맑은 고딕"/>
+                <a:cs typeface="맑은 고딕"/>
               </a:rPr>
               <a:t>●  </a:t>
             </a:r>
@@ -9536,6 +9702,8 @@
                   <a:srgbClr val="222733"/>
                 </a:solidFill>
                 <a:latin typeface="맑은 고딕"/>
+                <a:ea typeface="맑은 고딕"/>
+                <a:cs typeface="맑은 고딕"/>
               </a:rPr>
               <a:t>1) MySQL Pod에 접속해 테이블 생성 및 데이터 한 줄 삽입</a:t>
             </a:r>
@@ -9552,6 +9720,8 @@
                   <a:srgbClr val="0D9488"/>
                 </a:solidFill>
                 <a:latin typeface="맑은 고딕"/>
+                <a:ea typeface="맑은 고딕"/>
+                <a:cs typeface="맑은 고딕"/>
               </a:rPr>
               <a:t>●  </a:t>
             </a:r>
@@ -9561,6 +9731,8 @@
                   <a:srgbClr val="222733"/>
                 </a:solidFill>
                 <a:latin typeface="맑은 고딕"/>
+                <a:ea typeface="맑은 고딕"/>
+                <a:cs typeface="맑은 고딕"/>
               </a:rPr>
               <a:t>2) kubectl delete pod로 Pod를 강제로 삭제 (Deployment가 자동으로 재생성)</a:t>
             </a:r>
@@ -9577,6 +9749,8 @@
                   <a:srgbClr val="0D9488"/>
                 </a:solidFill>
                 <a:latin typeface="맑은 고딕"/>
+                <a:ea typeface="맑은 고딕"/>
+                <a:cs typeface="맑은 고딕"/>
               </a:rPr>
               <a:t>●  </a:t>
             </a:r>
@@ -9586,6 +9760,8 @@
                   <a:srgbClr val="222733"/>
                 </a:solidFill>
                 <a:latin typeface="맑은 고딕"/>
+                <a:ea typeface="맑은 고딕"/>
+                <a:cs typeface="맑은 고딕"/>
               </a:rPr>
               <a:t>3) 새로 생성된 Pod에 접속해 같은 데이터가 남아있는지 SELECT로 확인</a:t>
             </a:r>
@@ -9621,6 +9797,8 @@
                   <a:srgbClr val="5B6373"/>
                 </a:solidFill>
                 <a:latin typeface="맑은 고딕"/>
+                <a:ea typeface="맑은 고딕"/>
+                <a:cs typeface="맑은 고딕"/>
               </a:rPr>
               <a:t>클라우드인프라관리  ·  6주차 3차시</a:t>
             </a:r>
@@ -9656,6 +9834,8 @@
                   <a:srgbClr val="5B6373"/>
                 </a:solidFill>
                 <a:latin typeface="맑은 고딕"/>
+                <a:ea typeface="맑은 고딕"/>
+                <a:cs typeface="맑은 고딕"/>
               </a:rPr>
               <a:t>08 / 12</a:t>
             </a:r>
@@ -9859,6 +10039,8 @@
                   <a:srgbClr val="14213D"/>
                 </a:solidFill>
                 <a:latin typeface="맑은 고딕"/>
+                <a:ea typeface="맑은 고딕"/>
+                <a:cs typeface="맑은 고딕"/>
               </a:rPr>
               <a:t>03</a:t>
             </a:r>
@@ -9894,6 +10076,8 @@
                   <a:srgbClr val="14B8A6"/>
                 </a:solidFill>
                 <a:latin typeface="맑은 고딕"/>
+                <a:ea typeface="맑은 고딕"/>
+                <a:cs typeface="맑은 고딕"/>
               </a:rPr>
               <a:t>실습 안내</a:t>
             </a:r>
@@ -9929,6 +10113,8 @@
                   <a:srgbClr val="FFFFFF"/>
                 </a:solidFill>
                 <a:latin typeface="맑은 고딕"/>
+                <a:ea typeface="맑은 고딕"/>
+                <a:cs typeface="맑은 고딕"/>
               </a:rPr>
               <a:t>Killercoda — MySQL 배포+영속성 검증</a:t>
             </a:r>
@@ -9968,6 +10154,8 @@
                   <a:srgbClr val="0D9488"/>
                 </a:solidFill>
                 <a:latin typeface="맑은 고딕"/>
+                <a:ea typeface="맑은 고딕"/>
+                <a:cs typeface="맑은 고딕"/>
               </a:rPr>
               <a:t>●  </a:t>
             </a:r>
@@ -9977,6 +10165,8 @@
                   <a:srgbClr val="222733"/>
                 </a:solidFill>
                 <a:latin typeface="맑은 고딕"/>
+                <a:ea typeface="맑은 고딕"/>
+                <a:cs typeface="맑은 고딕"/>
               </a:rPr>
               <a:t>mysql.yaml 작성 (PVC 마운트 포함) 후 kubectl apply</a:t>
             </a:r>
@@ -9993,6 +10183,8 @@
                   <a:srgbClr val="0D9488"/>
                 </a:solidFill>
                 <a:latin typeface="맑은 고딕"/>
+                <a:ea typeface="맑은 고딕"/>
+                <a:cs typeface="맑은 고딕"/>
               </a:rPr>
               <a:t>●  </a:t>
             </a:r>
@@ -10002,6 +10194,8 @@
                   <a:srgbClr val="222733"/>
                 </a:solidFill>
                 <a:latin typeface="맑은 고딕"/>
+                <a:ea typeface="맑은 고딕"/>
+                <a:cs typeface="맑은 고딕"/>
               </a:rPr>
               <a:t>kubectl exec로 Pod 접속 → mysql 접속 → 테이블 생성, 데이터 삽입</a:t>
             </a:r>
@@ -10018,6 +10212,8 @@
                   <a:srgbClr val="0D9488"/>
                 </a:solidFill>
                 <a:latin typeface="맑은 고딕"/>
+                <a:ea typeface="맑은 고딕"/>
+                <a:cs typeface="맑은 고딕"/>
               </a:rPr>
               <a:t>●  </a:t>
             </a:r>
@@ -10027,6 +10223,8 @@
                   <a:srgbClr val="222733"/>
                 </a:solidFill>
                 <a:latin typeface="맑은 고딕"/>
+                <a:ea typeface="맑은 고딕"/>
+                <a:cs typeface="맑은 고딕"/>
               </a:rPr>
               <a:t>kubectl delete pod {mysql파드이름} 실행</a:t>
             </a:r>
@@ -10043,6 +10241,8 @@
                   <a:srgbClr val="DC2626"/>
                 </a:solidFill>
                 <a:latin typeface="맑은 고딕"/>
+                <a:ea typeface="맑은 고딕"/>
+                <a:cs typeface="맑은 고딕"/>
               </a:rPr>
               <a:t>●  </a:t>
             </a:r>
@@ -10052,6 +10252,8 @@
                   <a:srgbClr val="222733"/>
                 </a:solidFill>
                 <a:latin typeface="맑은 고딕"/>
+                <a:ea typeface="맑은 고딕"/>
+                <a:cs typeface="맑은 고딕"/>
               </a:rPr>
               <a:t>새 Pod가 Running 상태가 될 때까지 10~20초 정도 대기 필요</a:t>
             </a:r>
@@ -10068,6 +10270,8 @@
                   <a:srgbClr val="0D9488"/>
                 </a:solidFill>
                 <a:latin typeface="맑은 고딕"/>
+                <a:ea typeface="맑은 고딕"/>
+                <a:cs typeface="맑은 고딕"/>
               </a:rPr>
               <a:t>●  </a:t>
             </a:r>
@@ -10077,6 +10281,8 @@
                   <a:srgbClr val="222733"/>
                 </a:solidFill>
                 <a:latin typeface="맑은 고딕"/>
+                <a:ea typeface="맑은 고딕"/>
+                <a:cs typeface="맑은 고딕"/>
               </a:rPr>
               <a:t>새 Pod 접속 후 SELECT로 데이터가 그대로인지 확인</a:t>
             </a:r>
@@ -10112,6 +10318,8 @@
                   <a:srgbClr val="5B6373"/>
                 </a:solidFill>
                 <a:latin typeface="맑은 고딕"/>
+                <a:ea typeface="맑은 고딕"/>
+                <a:cs typeface="맑은 고딕"/>
               </a:rPr>
               <a:t>클라우드인프라관리  ·  6주차 3차시</a:t>
             </a:r>
@@ -10147,6 +10355,8 @@
                   <a:srgbClr val="5B6373"/>
                 </a:solidFill>
                 <a:latin typeface="맑은 고딕"/>
+                <a:ea typeface="맑은 고딕"/>
+                <a:cs typeface="맑은 고딕"/>
               </a:rPr>
               <a:t>09 / 12</a:t>
             </a:r>
